--- a/Final_Revision/Exam_Practice/FR-L05_Writing_Workshop_Mixed_Mock_Exam_1.pptx
+++ b/Final_Revision/Exam_Practice/FR-L05_Writing_Workshop_Mixed_Mock_Exam_1.pptx
@@ -784,7 +784,11 @@
           <a:lstStyle/>
           <a:p>
             <a:r>
-              <a:rPr lang="en-US" dirty="0"/>
+              <a:rPr lang="ar-SA" dirty="0">
+                <a:latin typeface="Amiri" pitchFamily="2" charset="-78"/>
+                <a:ea typeface="Amiri" pitchFamily="2" charset="-78"/>
+                <a:cs typeface="Amiri" pitchFamily="2" charset="-78"/>
+              </a:rPr>
               <a:t>Q3 (3 min to choose and read). Title (أ) suits Core and Develop; title (ب) suits Stretch.</a:t>
             </a:r>
             <a:endParaRPr lang="en-US" dirty="0"/>
@@ -1403,7 +1407,11 @@
           <a:lstStyle/>
           <a:p>
             <a:r>
-              <a:rPr lang="en-US" dirty="0"/>
+              <a:rPr lang="ar-SA" dirty="0">
+                <a:latin typeface="Amiri" pitchFamily="2" charset="-78"/>
+                <a:ea typeface="Amiri" pitchFamily="2" charset="-78"/>
+                <a:cs typeface="Amiri" pitchFamily="2" charset="-78"/>
+              </a:rPr>
               <a:t>WELCOME (1 min) — while students join.
 • Greet each student by name as they arrive: السَّلَامُ عَلَيْكُمْ. Take the register (Pastoral Tracker: attendance 0/1).
 • 2-MINUTE CHECK-IN (SEND training): a private chat to any student who seemed unsettled last lesson — “Are you okay today? 👍 / 👎”.
@@ -1936,7 +1944,11 @@
           <a:lstStyle/>
           <a:p>
             <a:r>
-              <a:rPr lang="en-US" dirty="0"/>
+              <a:rPr lang="ar-SA" dirty="0">
+                <a:latin typeface="Amiri" pitchFamily="2" charset="-78"/>
+                <a:ea typeface="Amiri" pitchFamily="2" charset="-78"/>
+                <a:cs typeface="Amiri" pitchFamily="2" charset="-78"/>
+              </a:rPr>
               <a:t>Question words: أَيْنَ / كَيْفَ (where / how — PAST) · صِفْ (describe!) · مَاذَا فَعَلْتَ (what did you do) · رَأْيُكَ (opinion → comparison) · خِطَطُكَ (FUTURE).</a:t>
             </a:r>
             <a:endParaRPr lang="en-US" dirty="0"/>
@@ -2508,6 +2520,7 @@
                   <a:srgbClr val="D4AF37"/>
                 </a:solidFill>
                 <a:latin typeface="Amiri" pitchFamily="2" charset="-78"/>
+                <a:ea typeface="Amiri" pitchFamily="2" charset="-78"/>
                 <a:cs typeface="Amiri" pitchFamily="2" charset="-78"/>
               </a:rPr>
               <a:t>م</a:t>
@@ -2714,6 +2727,7 @@
                   <a:srgbClr val="D4AF37"/>
                 </a:solidFill>
                 <a:latin typeface="Amiri" pitchFamily="2" charset="-78"/>
+                <a:ea typeface="Amiri" pitchFamily="2" charset="-78"/>
                 <a:cs typeface="Amiri" pitchFamily="2" charset="-78"/>
               </a:rPr>
               <a:t>وَرْشَةُ الكِتَابَةِ — امْتِحَانٌ تَجْرِيبِيٌّ شَامِلٌ (١)</a:t>
@@ -3171,6 +3185,7 @@
                   <a:srgbClr val="D4AF37"/>
                 </a:solidFill>
                 <a:latin typeface="Amiri" pitchFamily="2" charset="-78"/>
+                <a:ea typeface="Amiri" pitchFamily="2" charset="-78"/>
                 <a:cs typeface="Amiri" pitchFamily="2" charset="-78"/>
               </a:rPr>
               <a:t>م</a:t>
@@ -3491,6 +3506,7 @@
                   <a:srgbClr val="8A6D1E"/>
                 </a:solidFill>
                 <a:latin typeface="Amiri" pitchFamily="2" charset="-78"/>
+                <a:ea typeface="Amiri" pitchFamily="2" charset="-78"/>
                 <a:cs typeface="Amiri" pitchFamily="2" charset="-78"/>
               </a:rPr>
               <a:t>نَمُوذَجُ الإِجَابَةِ</a:t>
@@ -3604,6 +3620,7 @@
                   <a:srgbClr val="1F2A37"/>
                 </a:solidFill>
                 <a:latin typeface="Amiri" pitchFamily="2" charset="-78"/>
+                <a:ea typeface="Amiri" pitchFamily="2" charset="-78"/>
                 <a:cs typeface="Amiri" pitchFamily="2" charset="-78"/>
               </a:rPr>
               <a:t>مَرْحَبًا يَا حَسَنُ،</a:t>
@@ -3623,6 +3640,7 @@
                   <a:srgbClr val="1F2A37"/>
                 </a:solidFill>
                 <a:latin typeface="Amiri" pitchFamily="2" charset="-78"/>
+                <a:ea typeface="Amiri" pitchFamily="2" charset="-78"/>
                 <a:cs typeface="Amiri" pitchFamily="2" charset="-78"/>
               </a:rPr>
               <a:t>كَيْفَ حَالُكَ؟ قَضَيْتُ عُطْلَةَ نِهَايَةِ الأُسْبُوعِ عِنْدَ جَدِّي وَجَدَّتِي فِي قَرْيَةٍ فِي شَمَالِ وِيلْزَ. سَافَرْنَا بِالقِطَارِ، وَاسْتَغْرَقَتِ الرِّحْلَةُ ثَلَاثَ سَاعَاتٍ. القَرْيَةُ صَغِيرَةٌ وَهَادِئَةٌ، وَفِيهَا جِبَالٌ خَضْرَاءُ وَنَهْرٌ جَمِيلٌ. يَوْمَ السَّبْتِ مَشَيْنَا فِي الجِبَالِ، لٰكِنَّ الجَوَّ كَانَ بَارِدًا وَمُمْطِرًا. فِي المَسَاءِ طَبَخَتْ جَدَّتِي طَعَامًا لَذِيذًا، وَلَعِبْنَا الشِّطْرَنْجَ مَعَ جَدِّي. أَظُنُّ أَنَّ الحَيَاةَ فِي القَرْيَةِ أَهْدَأُ مِنَ المَدِينَةِ، لٰكِنَّهَا مُمِلَّةٌ قَلِيلًا. فِي الصَّيْفِ سَأَعُودُ إِلَى هُنَاكَ أُسْبُوعَيْنِ. وَأَنْتَ، أَيْنَ قَضَيْتَ العُطْلَةَ؟</a:t>
@@ -3642,6 +3660,7 @@
                   <a:srgbClr val="1F2A37"/>
                 </a:solidFill>
                 <a:latin typeface="Amiri" pitchFamily="2" charset="-78"/>
+                <a:ea typeface="Amiri" pitchFamily="2" charset="-78"/>
                 <a:cs typeface="Amiri" pitchFamily="2" charset="-78"/>
               </a:rPr>
               <a:t>إِلَى اللِّقَاءِ،</a:t>
@@ -3661,6 +3680,7 @@
                   <a:srgbClr val="1F2A37"/>
                 </a:solidFill>
                 <a:latin typeface="Amiri" pitchFamily="2" charset="-78"/>
+                <a:ea typeface="Amiri" pitchFamily="2" charset="-78"/>
                 <a:cs typeface="Amiri" pitchFamily="2" charset="-78"/>
               </a:rPr>
               <a:t>أُسَامَةُ</a:t>
@@ -3824,11 +3844,12 @@
               <a:buNone/>
             </a:pPr>
             <a:r>
-              <a:rPr lang="en-US" sz="950" b="1" dirty="0">
+              <a:rPr lang="ar-SA" sz="950" b="1" dirty="0">
                 <a:solidFill>
                   <a:srgbClr val="FFFFFF"/>
                 </a:solidFill>
                 <a:latin typeface="Calibri" pitchFamily="34" charset="0"/>
+                <a:ea typeface="Amiri" pitchFamily="2" charset="-78"/>
                 <a:cs typeface="Amiri" pitchFamily="2" charset="-78"/>
               </a:rPr>
               <a:t>وَاسْتَغْرَقَتِ الرِّحْلَةُ</a:t>
@@ -3889,11 +3910,12 @@
               <a:buNone/>
             </a:pPr>
             <a:r>
-              <a:rPr lang="en-US" sz="950" b="1" dirty="0">
+              <a:rPr lang="ar-SA" sz="950" b="1" dirty="0">
                 <a:solidFill>
                   <a:srgbClr val="FFFFFF"/>
                 </a:solidFill>
                 <a:latin typeface="Calibri" pitchFamily="34" charset="0"/>
+                <a:ea typeface="Amiri" pitchFamily="2" charset="-78"/>
                 <a:cs typeface="Amiri" pitchFamily="2" charset="-78"/>
               </a:rPr>
               <a:t>جِبَالٌ خَضْرَاءُ</a:t>
@@ -3954,11 +3976,12 @@
               <a:buNone/>
             </a:pPr>
             <a:r>
-              <a:rPr lang="en-US" sz="950" b="1" dirty="0">
+              <a:rPr lang="ar-SA" sz="950" b="1" dirty="0">
                 <a:solidFill>
                   <a:srgbClr val="FFFFFF"/>
                 </a:solidFill>
                 <a:latin typeface="Calibri" pitchFamily="34" charset="0"/>
+                <a:ea typeface="Amiri" pitchFamily="2" charset="-78"/>
                 <a:cs typeface="Amiri" pitchFamily="2" charset="-78"/>
               </a:rPr>
               <a:t>أَهْدَأُ مِنَ المَدِينَةِ</a:t>
@@ -4019,11 +4042,12 @@
               <a:buNone/>
             </a:pPr>
             <a:r>
-              <a:rPr lang="en-US" sz="950" b="1" dirty="0">
+              <a:rPr lang="ar-SA" sz="950" b="1" dirty="0">
                 <a:solidFill>
                   <a:srgbClr val="FFFFFF"/>
                 </a:solidFill>
                 <a:latin typeface="Calibri" pitchFamily="34" charset="0"/>
+                <a:ea typeface="Amiri" pitchFamily="2" charset="-78"/>
                 <a:cs typeface="Amiri" pitchFamily="2" charset="-78"/>
               </a:rPr>
               <a:t>سَأَعُودُ إِلَى هُنَاكَ</a:t>
@@ -4157,6 +4181,7 @@
                   <a:srgbClr val="D4AF37"/>
                 </a:solidFill>
                 <a:latin typeface="Amiri" pitchFamily="2" charset="-78"/>
+                <a:ea typeface="Amiri" pitchFamily="2" charset="-78"/>
                 <a:cs typeface="Amiri" pitchFamily="2" charset="-78"/>
               </a:rPr>
               <a:t>م</a:t>
@@ -4477,6 +4502,7 @@
                   <a:srgbClr val="8A6D1E"/>
                 </a:solidFill>
                 <a:latin typeface="Amiri" pitchFamily="2" charset="-78"/>
+                <a:ea typeface="Amiri" pitchFamily="2" charset="-78"/>
                 <a:cs typeface="Amiri" pitchFamily="2" charset="-78"/>
               </a:rPr>
               <a:t>نَمُوذَجُ الإِجَابَةِ</a:t>
@@ -4590,6 +4616,7 @@
                   <a:srgbClr val="1F2A37"/>
                 </a:solidFill>
                 <a:latin typeface="Amiri" pitchFamily="2" charset="-78"/>
+                <a:ea typeface="Amiri" pitchFamily="2" charset="-78"/>
                 <a:cs typeface="Amiri" pitchFamily="2" charset="-78"/>
               </a:rPr>
               <a:t>عَزِيزِي حَسَنُ،</a:t>
@@ -4609,6 +4636,7 @@
                   <a:srgbClr val="1F2A37"/>
                 </a:solidFill>
                 <a:latin typeface="Amiri" pitchFamily="2" charset="-78"/>
+                <a:ea typeface="Amiri" pitchFamily="2" charset="-78"/>
                 <a:cs typeface="Amiri" pitchFamily="2" charset="-78"/>
               </a:rPr>
               <a:t>عُدْتُ أَمْسِ مِنْ عُطْلَةِ نِهَايَةِ أُسْبُوعٍ عِنْدَ جَدِّي وَجَدَّتِي فِي قَرْيَةٍ صَغِيرَةٍ تَقَعُ فِي شَمَالِ وِيلْزَ، بَيْنَ الجِبَالِ وَالبَحْرِ. سَافَرْنَا بِالقِطَارِ ثَلَاثَ سَاعَاتٍ، فَتَغَيَّرَ المَنْظَرُ تَدْرِيجِيًّا مِنَ المَبَانِي الرَّمَادِيَّةِ إِلَى الحُقُولِ الخَضْرَاءِ. وَمَعَ أَنَّ المَطَرَ لَمْ يَتَوَقَّفْ يَوْمَ السَّبْتِ، فَقَدْ مَشَيْنَا إِلَى شَلَّالٍ قَدِيمٍ، ثُمَّ جَلَسْنَا حَوْلَ المِدْفَأَةِ نَشْرَبُ الشَّايَ وَنَسْمَعُ قِصَصَ جَدِّي عَنْ طُفُولَتِهِ. صَحِيحٌ أَنَّ الحَيَاةَ هُنَاكَ أَبْطَأُ بِكَثِيرٍ مِنْ مَدِينَتِنَا، غَيْرَ أَنَّ هٰذَا البُطْءَ هُوَ مَا أَحْتَاجُ إِلَيْهِ قَبْلَ الامْتِحَانَاتِ. وَإِذَا نَجَحْتُ، فَسَأَقْضِي هُنَاكَ أُسْبُوعَيْنِ فِي الصَّيْفِ. هَلْ تَأْتِي مَعِي؟</a:t>
@@ -4628,6 +4656,7 @@
                   <a:srgbClr val="1F2A37"/>
                 </a:solidFill>
                 <a:latin typeface="Amiri" pitchFamily="2" charset="-78"/>
+                <a:ea typeface="Amiri" pitchFamily="2" charset="-78"/>
                 <a:cs typeface="Amiri" pitchFamily="2" charset="-78"/>
               </a:rPr>
               <a:t>مَعَ تَحِيَّاتِي،</a:t>
@@ -4647,6 +4676,7 @@
                   <a:srgbClr val="1F2A37"/>
                 </a:solidFill>
                 <a:latin typeface="Amiri" pitchFamily="2" charset="-78"/>
+                <a:ea typeface="Amiri" pitchFamily="2" charset="-78"/>
                 <a:cs typeface="Amiri" pitchFamily="2" charset="-78"/>
               </a:rPr>
               <a:t>أُسَامَةُ</a:t>
@@ -4810,11 +4840,12 @@
               <a:buNone/>
             </a:pPr>
             <a:r>
-              <a:rPr lang="en-US" sz="950" b="1" dirty="0">
+              <a:rPr lang="ar-SA" sz="950" b="1" dirty="0">
                 <a:solidFill>
                   <a:srgbClr val="FFFFFF"/>
                 </a:solidFill>
                 <a:latin typeface="Calibri" pitchFamily="34" charset="0"/>
+                <a:ea typeface="Amiri" pitchFamily="2" charset="-78"/>
                 <a:cs typeface="Amiri" pitchFamily="2" charset="-78"/>
               </a:rPr>
               <a:t>تَقَعُ فِي شَمَالِ … بَيْنَ</a:t>
@@ -4875,11 +4906,12 @@
               <a:buNone/>
             </a:pPr>
             <a:r>
-              <a:rPr lang="en-US" sz="950" b="1" dirty="0">
+              <a:rPr lang="ar-SA" sz="950" b="1" dirty="0">
                 <a:solidFill>
                   <a:srgbClr val="FFFFFF"/>
                 </a:solidFill>
                 <a:latin typeface="Calibri" pitchFamily="34" charset="0"/>
+                <a:ea typeface="Amiri" pitchFamily="2" charset="-78"/>
                 <a:cs typeface="Amiri" pitchFamily="2" charset="-78"/>
               </a:rPr>
               <a:t>مِنَ المَبَانِي الرَّمَادِيَّةِ إِلَى</a:t>
@@ -4940,11 +4972,12 @@
               <a:buNone/>
             </a:pPr>
             <a:r>
-              <a:rPr lang="en-US" sz="950" b="1" dirty="0">
+              <a:rPr lang="ar-SA" sz="950" b="1" dirty="0">
                 <a:solidFill>
                   <a:srgbClr val="FFFFFF"/>
                 </a:solidFill>
                 <a:latin typeface="Calibri" pitchFamily="34" charset="0"/>
+                <a:ea typeface="Amiri" pitchFamily="2" charset="-78"/>
                 <a:cs typeface="Amiri" pitchFamily="2" charset="-78"/>
               </a:rPr>
               <a:t>مَعَ أَنَّ … فَقَدْ</a:t>
@@ -5005,11 +5038,12 @@
               <a:buNone/>
             </a:pPr>
             <a:r>
-              <a:rPr lang="en-US" sz="950" b="1" dirty="0">
+              <a:rPr lang="ar-SA" sz="950" b="1" dirty="0">
                 <a:solidFill>
                   <a:srgbClr val="FFFFFF"/>
                 </a:solidFill>
                 <a:latin typeface="Calibri" pitchFamily="34" charset="0"/>
+                <a:ea typeface="Amiri" pitchFamily="2" charset="-78"/>
                 <a:cs typeface="Amiri" pitchFamily="2" charset="-78"/>
               </a:rPr>
               <a:t>أَبْطَأُ بِكَثِيرٍ مِنْ</a:t>
@@ -5143,6 +5177,7 @@
                   <a:srgbClr val="D4AF37"/>
                 </a:solidFill>
                 <a:latin typeface="Amiri" pitchFamily="2" charset="-78"/>
+                <a:ea typeface="Amiri" pitchFamily="2" charset="-78"/>
                 <a:cs typeface="Amiri" pitchFamily="2" charset="-78"/>
               </a:rPr>
               <a:t>م</a:t>
@@ -5463,6 +5498,7 @@
                   <a:srgbClr val="8A6D1E"/>
                 </a:solidFill>
                 <a:latin typeface="Amiri" pitchFamily="2" charset="-78"/>
+                <a:ea typeface="Amiri" pitchFamily="2" charset="-78"/>
                 <a:cs typeface="Amiri" pitchFamily="2" charset="-78"/>
               </a:rPr>
               <a:t>اخْتَرْ عُنْوَانًا وَاحِدًا</a:t>
@@ -5743,6 +5779,7 @@
                   <a:srgbClr val="1B3B6F"/>
                 </a:solidFill>
                 <a:latin typeface="Amiri" pitchFamily="2" charset="-78"/>
+                <a:ea typeface="Amiri" pitchFamily="2" charset="-78"/>
                 <a:cs typeface="Amiri" pitchFamily="2" charset="-78"/>
               </a:rPr>
               <a:t>يَوْمٌ لَا أَنْسَاهُ</a:t>
@@ -5781,6 +5818,7 @@
                   <a:srgbClr val="1B3B6F"/>
                 </a:solidFill>
                 <a:latin typeface="Amiri" pitchFamily="2" charset="-78"/>
+                <a:ea typeface="Amiri" pitchFamily="2" charset="-78"/>
                 <a:cs typeface="Amiri" pitchFamily="2" charset="-78"/>
               </a:rPr>
               <a:t>(أ)</a:t>
@@ -5887,6 +5925,7 @@
                   <a:srgbClr val="1B3B6F"/>
                 </a:solidFill>
                 <a:latin typeface="Amiri" pitchFamily="2" charset="-78"/>
+                <a:ea typeface="Amiri" pitchFamily="2" charset="-78"/>
                 <a:cs typeface="Amiri" pitchFamily="2" charset="-78"/>
               </a:rPr>
               <a:t>مَتَى كَانَ وَلِمَاذَا كَانَ مُهِمًّا · مَاذَا حَدَثَ بِالتَّرْتِيبِ · مَشَاعِرُكَ وَمَنْ كَانَ مَعَكَ · مَا تَعَلَّمْتَهُ وَخُطَطُكَ</a:t>
@@ -6018,6 +6057,7 @@
                   <a:srgbClr val="1B3B6F"/>
                 </a:solidFill>
                 <a:latin typeface="Amiri" pitchFamily="2" charset="-78"/>
+                <a:ea typeface="Amiri" pitchFamily="2" charset="-78"/>
                 <a:cs typeface="Amiri" pitchFamily="2" charset="-78"/>
               </a:rPr>
               <a:t>هَلِ الحَيَاةُ فِي المَدِينَةِ أَفْضَلُ مِنَ الحَيَاةِ فِي الرِّيفِ؟</a:t>
@@ -6056,6 +6096,7 @@
                   <a:srgbClr val="1B3B6F"/>
                 </a:solidFill>
                 <a:latin typeface="Amiri" pitchFamily="2" charset="-78"/>
+                <a:ea typeface="Amiri" pitchFamily="2" charset="-78"/>
                 <a:cs typeface="Amiri" pitchFamily="2" charset="-78"/>
               </a:rPr>
               <a:t>(ب)</a:t>
@@ -6159,6 +6200,7 @@
                   <a:srgbClr val="1B3B6F"/>
                 </a:solidFill>
                 <a:latin typeface="Amiri" pitchFamily="2" charset="-78"/>
+                <a:ea typeface="Amiri" pitchFamily="2" charset="-78"/>
                 <a:cs typeface="Amiri" pitchFamily="2" charset="-78"/>
               </a:rPr>
               <a:t>المَوْضُوعُ · مَزَايَا المَدِينَةِ وَالرِّيفِ · مِثَالٌ مِنْ عَائِلَتِكَ · رَأْيُكَ</a:t>
@@ -6358,6 +6400,7 @@
                   <a:srgbClr val="D4AF37"/>
                 </a:solidFill>
                 <a:latin typeface="Amiri" pitchFamily="2" charset="-78"/>
+                <a:ea typeface="Amiri" pitchFamily="2" charset="-78"/>
                 <a:cs typeface="Amiri" pitchFamily="2" charset="-78"/>
               </a:rPr>
               <a:t>م</a:t>
@@ -6678,6 +6721,7 @@
                   <a:srgbClr val="8A6D1E"/>
                 </a:solidFill>
                 <a:latin typeface="Amiri" pitchFamily="2" charset="-78"/>
+                <a:ea typeface="Amiri" pitchFamily="2" charset="-78"/>
                 <a:cs typeface="Amiri" pitchFamily="2" charset="-78"/>
               </a:rPr>
               <a:t>خُطَّةُ الكِتَابَةِ</a:t>
@@ -7302,6 +7346,7 @@
                   <a:srgbClr val="1B3B6F"/>
                 </a:solidFill>
                 <a:latin typeface="Amiri" pitchFamily="2" charset="-78"/>
+                <a:ea typeface="Amiri" pitchFamily="2" charset="-78"/>
                 <a:cs typeface="Amiri" pitchFamily="2" charset="-78"/>
               </a:rPr>
               <a:t>اسْتَيْقَظْتُ فِي السَّادِسَةِ، لِأَنِّي كُنْتُ قَلِقًا.</a:t>
@@ -7401,6 +7446,7 @@
                   <a:srgbClr val="1B3B6F"/>
                 </a:solidFill>
                 <a:latin typeface="Amiri" pitchFamily="2" charset="-78"/>
+                <a:ea typeface="Amiri" pitchFamily="2" charset="-78"/>
                 <a:cs typeface="Amiri" pitchFamily="2" charset="-78"/>
               </a:rPr>
               <a:t>كَانَتِ النَّتِيجَةُ أَفْضَلَ مِمَّا تَوَقَّعْتُ.</a:t>
@@ -7500,6 +7546,7 @@
                   <a:srgbClr val="1B3B6F"/>
                 </a:solidFill>
                 <a:latin typeface="Amiri" pitchFamily="2" charset="-78"/>
+                <a:ea typeface="Amiri" pitchFamily="2" charset="-78"/>
                 <a:cs typeface="Amiri" pitchFamily="2" charset="-78"/>
               </a:rPr>
               <a:t>فِي المُسْتَقْبَلِ أُرِيدُ أَنْ أَدْرُسَ الهَنْدَسَةَ.</a:t>
@@ -7661,6 +7708,7 @@
                   <a:srgbClr val="1F2A37"/>
                 </a:solidFill>
                 <a:latin typeface="Amiri" pitchFamily="2" charset="-78"/>
+                <a:ea typeface="Amiri" pitchFamily="2" charset="-78"/>
                 <a:cs typeface="Amiri" pitchFamily="2" charset="-78"/>
               </a:rPr>
               <a:t>أ</a:t>
@@ -7687,6 +7735,7 @@
                   <a:srgbClr val="1F2A37"/>
                 </a:solidFill>
                 <a:latin typeface="Amiri" pitchFamily="2" charset="-78"/>
+                <a:ea typeface="Amiri" pitchFamily="2" charset="-78"/>
                 <a:cs typeface="Amiri" pitchFamily="2" charset="-78"/>
               </a:rPr>
               <a:t>ب</a:t>
@@ -7833,6 +7882,7 @@
                   <a:srgbClr val="D4AF37"/>
                 </a:solidFill>
                 <a:latin typeface="Amiri" pitchFamily="2" charset="-78"/>
+                <a:ea typeface="Amiri" pitchFamily="2" charset="-78"/>
                 <a:cs typeface="Amiri" pitchFamily="2" charset="-78"/>
               </a:rPr>
               <a:t>م</a:t>
@@ -8090,6 +8140,7 @@
                   <a:srgbClr val="8A6D1E"/>
                 </a:solidFill>
                 <a:latin typeface="Amiri" pitchFamily="2" charset="-78"/>
+                <a:ea typeface="Amiri" pitchFamily="2" charset="-78"/>
                 <a:cs typeface="Amiri" pitchFamily="2" charset="-78"/>
               </a:rPr>
               <a:t>أ</a:t>
@@ -8154,6 +8205,7 @@
                   <a:srgbClr val="1B3B6F"/>
                 </a:solidFill>
                 <a:latin typeface="Amiri" pitchFamily="2" charset="-78"/>
+                <a:ea typeface="Amiri" pitchFamily="2" charset="-78"/>
                 <a:cs typeface="Amiri" pitchFamily="2" charset="-78"/>
               </a:rPr>
               <a:t>أ</a:t>
@@ -8205,6 +8257,7 @@
                   <a:srgbClr val="8A6D1E"/>
                 </a:solidFill>
                 <a:latin typeface="Amiri" pitchFamily="2" charset="-78"/>
+                <a:ea typeface="Amiri" pitchFamily="2" charset="-78"/>
                 <a:cs typeface="Amiri" pitchFamily="2" charset="-78"/>
               </a:rPr>
               <a:t>نَمُوذَجُ الإِجَابَةِ</a:t>
@@ -8318,6 +8371,7 @@
                   <a:srgbClr val="1F2A37"/>
                 </a:solidFill>
                 <a:latin typeface="Amiri" pitchFamily="2" charset="-78"/>
+                <a:ea typeface="Amiri" pitchFamily="2" charset="-78"/>
                 <a:cs typeface="Amiri" pitchFamily="2" charset="-78"/>
               </a:rPr>
               <a:t>يَوْمٌ لَا أَنْسَاهُ هُوَ يَوْمُ نَتَائِجِ امْتِحَانَاتِ الصَّفِّ العَاشِرِ فِي السَّنَةِ المَاضِيَةِ. اسْتَيْقَظْتُ فِي السَّادِسَةِ، لِأَنِّي كُنْتُ قَلِقًا جِدًّا، وَلَمْ آكُلْ فُطُورِي. شَرِبْتُ كُوبًا مِنَ الحَلِيبِ فَقَطْ، وَلَبِسْتُ مَلَابِسِي بِسُرْعَةٍ.</a:t>
@@ -8337,6 +8391,7 @@
                   <a:srgbClr val="1F2A37"/>
                 </a:solidFill>
                 <a:latin typeface="Amiri" pitchFamily="2" charset="-78"/>
+                <a:ea typeface="Amiri" pitchFamily="2" charset="-78"/>
                 <a:cs typeface="Amiri" pitchFamily="2" charset="-78"/>
               </a:rPr>
               <a:t>ذَهَبْتُ إِلَى المَدْرَسَةِ مَعَ صَدِيقِي آدَمَ. كَانَ الجَوُّ بَارِدًا وَمُمْطِرًا، لٰكِنَّ المَدْرَسَةَ كَانَتْ مُزْدَحِمَةً بِالطُّلَّابِ وَالآبَاءِ. فِي السَّاعَةِ التَّاسِعَةِ أَخَذْتُ الظَّرْفَ، وَفَتَحْتُهُ بِبُطْءٍ. كَانَ آدَمُ يَقِفُ بِجَانِبِي، وَكَانَ قَلِقًا مِثْلِي.</a:t>
@@ -8356,6 +8411,7 @@
                   <a:srgbClr val="1F2A37"/>
                 </a:solidFill>
                 <a:latin typeface="Amiri" pitchFamily="2" charset="-78"/>
+                <a:ea typeface="Amiri" pitchFamily="2" charset="-78"/>
                 <a:cs typeface="Amiri" pitchFamily="2" charset="-78"/>
               </a:rPr>
               <a:t>نَجَحْتُ فِي كُلِّ المَوَادِّ! كَانَتْ نَتِيجَةُ العَرَبِيَّةِ أَفْضَلَ نَتِيجَةٍ، لِأَنِّي رَاجَعْتُ كَثِيرًا. اتَّصَلْتُ بِأُمِّي فَوْرًا، وَكَانَتْ سَعِيدَةً جِدًّا. فِي المَسَاءِ ذَهَبْنَا إِلَى مَطْعَمٍ لُبْنَانِيٍّ، وَأَكَلْنَا المَشَاوِيَ وَالسَّلَطَةَ مَعَ كُلِّ العَائِلَةِ. كَانَ أَجْمَلَ مَسَاءٍ فِي السَّنَةِ.</a:t>
@@ -8375,6 +8431,7 @@
                   <a:srgbClr val="1F2A37"/>
                 </a:solidFill>
                 <a:latin typeface="Amiri" pitchFamily="2" charset="-78"/>
+                <a:ea typeface="Amiri" pitchFamily="2" charset="-78"/>
                 <a:cs typeface="Amiri" pitchFamily="2" charset="-78"/>
               </a:rPr>
               <a:t>تَعَلَّمْتُ أَنَّ التَّعَبَ وَالمُرَاجَعَةَ يُعْطِيَانِ نَتِيجَةً. الآنَ أُرَاجِعُ لِامْتِحَانَاتِ الصَّفِّ الحَادِي عَشَرَ، وَفِي المُسْتَقْبَلِ أُرِيدُ أَنْ أَدْرُسَ الهَنْدَسَةَ فِي الجَامِعَةِ.</a:t>
@@ -8538,11 +8595,12 @@
               <a:buNone/>
             </a:pPr>
             <a:r>
-              <a:rPr lang="en-US" sz="950" b="1" dirty="0">
+              <a:rPr lang="ar-SA" sz="950" b="1" dirty="0">
                 <a:solidFill>
                   <a:srgbClr val="FFFFFF"/>
                 </a:solidFill>
                 <a:latin typeface="Calibri" pitchFamily="34" charset="0"/>
+                <a:ea typeface="Amiri" pitchFamily="2" charset="-78"/>
                 <a:cs typeface="Amiri" pitchFamily="2" charset="-78"/>
               </a:rPr>
               <a:t>لِأَنِّي كُنْتُ قَلِقًا</a:t>
@@ -8603,11 +8661,12 @@
               <a:buNone/>
             </a:pPr>
             <a:r>
-              <a:rPr lang="en-US" sz="950" b="1" dirty="0">
+              <a:rPr lang="ar-SA" sz="950" b="1" dirty="0">
                 <a:solidFill>
                   <a:srgbClr val="FFFFFF"/>
                 </a:solidFill>
                 <a:latin typeface="Calibri" pitchFamily="34" charset="0"/>
+                <a:ea typeface="Amiri" pitchFamily="2" charset="-78"/>
                 <a:cs typeface="Amiri" pitchFamily="2" charset="-78"/>
               </a:rPr>
               <a:t>كَانَ الجَوُّ بَارِدًا</a:t>
@@ -8668,11 +8727,12 @@
               <a:buNone/>
             </a:pPr>
             <a:r>
-              <a:rPr lang="en-US" sz="950" b="1" dirty="0">
+              <a:rPr lang="ar-SA" sz="950" b="1" dirty="0">
                 <a:solidFill>
                   <a:srgbClr val="FFFFFF"/>
                 </a:solidFill>
                 <a:latin typeface="Calibri" pitchFamily="34" charset="0"/>
+                <a:ea typeface="Amiri" pitchFamily="2" charset="-78"/>
                 <a:cs typeface="Amiri" pitchFamily="2" charset="-78"/>
               </a:rPr>
               <a:t>أَفْضَلَ نَتِيجَةٍ</a:t>
@@ -8733,11 +8793,12 @@
               <a:buNone/>
             </a:pPr>
             <a:r>
-              <a:rPr lang="en-US" sz="950" b="1" dirty="0">
+              <a:rPr lang="ar-SA" sz="950" b="1" dirty="0">
                 <a:solidFill>
                   <a:srgbClr val="FFFFFF"/>
                 </a:solidFill>
                 <a:latin typeface="Calibri" pitchFamily="34" charset="0"/>
+                <a:ea typeface="Amiri" pitchFamily="2" charset="-78"/>
                 <a:cs typeface="Amiri" pitchFamily="2" charset="-78"/>
               </a:rPr>
               <a:t>أُرِيدُ أَنْ أَدْرُسَ</a:t>
@@ -8871,6 +8932,7 @@
                   <a:srgbClr val="D4AF37"/>
                 </a:solidFill>
                 <a:latin typeface="Amiri" pitchFamily="2" charset="-78"/>
+                <a:ea typeface="Amiri" pitchFamily="2" charset="-78"/>
                 <a:cs typeface="Amiri" pitchFamily="2" charset="-78"/>
               </a:rPr>
               <a:t>م</a:t>
@@ -9128,6 +9190,7 @@
                   <a:srgbClr val="8A6D1E"/>
                 </a:solidFill>
                 <a:latin typeface="Amiri" pitchFamily="2" charset="-78"/>
+                <a:ea typeface="Amiri" pitchFamily="2" charset="-78"/>
                 <a:cs typeface="Amiri" pitchFamily="2" charset="-78"/>
               </a:rPr>
               <a:t>أ</a:t>
@@ -9192,6 +9255,7 @@
                   <a:srgbClr val="1B3B6F"/>
                 </a:solidFill>
                 <a:latin typeface="Amiri" pitchFamily="2" charset="-78"/>
+                <a:ea typeface="Amiri" pitchFamily="2" charset="-78"/>
                 <a:cs typeface="Amiri" pitchFamily="2" charset="-78"/>
               </a:rPr>
               <a:t>أ</a:t>
@@ -9243,6 +9307,7 @@
                   <a:srgbClr val="8A6D1E"/>
                 </a:solidFill>
                 <a:latin typeface="Amiri" pitchFamily="2" charset="-78"/>
+                <a:ea typeface="Amiri" pitchFamily="2" charset="-78"/>
                 <a:cs typeface="Amiri" pitchFamily="2" charset="-78"/>
               </a:rPr>
               <a:t>نَمُوذَجُ الإِجَابَةِ</a:t>
@@ -9356,6 +9421,7 @@
                   <a:srgbClr val="1F2A37"/>
                 </a:solidFill>
                 <a:latin typeface="Amiri" pitchFamily="2" charset="-78"/>
+                <a:ea typeface="Amiri" pitchFamily="2" charset="-78"/>
                 <a:cs typeface="Amiri" pitchFamily="2" charset="-78"/>
               </a:rPr>
               <a:t>لَمْ يَكُنْ يَوْمًا عَادِيًّا ذٰلِكَ الخَمِيسُ مِنْ شَهْرِ أَغُسْطُسَ؛ فَقَدِ اسْتَيْقَظْتُ قَبْلَ المُنَبِّهِ بِسَاعَةٍ، وَقَلْبِي يَدُقُّ بِسُرْعَةٍ، لِأَنَّهُ كَانَ يَوْمَ نَتَائِجِ الامْتِحَانَاتِ الَّتِي رَاجَعْتُ لَهَا شُهُورًا. لَمْ أَسْتَطِعْ أَنْ آكُلَ شَيْئًا، فَاكْتَفَيْتُ بِكُوبٍ مِنَ الشَّايِ، وَخَرَجْتُ مِنَ البَيْتِ دُونَ أَنْ أُوقِظَ أَحَدًا.</a:t>
@@ -9375,6 +9441,7 @@
                   <a:srgbClr val="1F2A37"/>
                 </a:solidFill>
                 <a:latin typeface="Amiri" pitchFamily="2" charset="-78"/>
+                <a:ea typeface="Amiri" pitchFamily="2" charset="-78"/>
                 <a:cs typeface="Amiri" pitchFamily="2" charset="-78"/>
               </a:rPr>
               <a:t>كَانَ المَطَرُ يَتَسَاقَطُ بِهُدُوءٍ وَأَنَا أَمْشِي مَعَ صَدِيقِي آدَمَ إِلَى المَدْرَسَةِ، وَكُنَّا نَتَظَاهَرُ بِأَنَّنَا غَيْرُ قَلِقَيْنِ. وَحِينَ وَصَلْنَا، وَجَدْنَا السَّاحَةَ مُزْدَحِمَةً بِالطُّلَّابِ وَالآبَاءِ، بَعْضُهُمْ يَبْكِي فَرَحًا، وَبَعْضُهُمْ يُحَاوِلُ أَنْ يُخْفِيَ خَيْبَتَهُ، وَالمُعَلِّمُونَ يَتَنَقَّلُونَ بَيْنَهُمْ بِابْتِسَامَاتٍ هَادِئَةٍ.</a:t>
@@ -9394,6 +9461,7 @@
                   <a:srgbClr val="1F2A37"/>
                 </a:solidFill>
                 <a:latin typeface="Amiri" pitchFamily="2" charset="-78"/>
+                <a:ea typeface="Amiri" pitchFamily="2" charset="-78"/>
                 <a:cs typeface="Amiri" pitchFamily="2" charset="-78"/>
               </a:rPr>
               <a:t>فَتَحْتُ الظَّرْفَ بِيَدَيْنِ مُرْتَجِفَتَيْنِ، فَوَجَدْتُ أَنَّنِي نَجَحْتُ فِي كُلِّ المَوَادِّ، وَأَنَّ نَتِيجَةَ العَرَبِيَّةِ كَانَتْ أَعْلَى مِمَّا تَوَقَّعْتُ. عِنْدَئِذٍ اتَّصَلْتُ بِأُمِّي، فَسَمِعْتُهَا تَبْكِي لِأَوَّلِ مَرَّةٍ مِنَ الفَرَحِ. وَفِي المَسَاءِ احْتَفَلَتِ العَائِلَةُ كُلُّهَا بِعَشَاءٍ فِي مَطْعَمِنَا المُفَضَّلِ.</a:t>
@@ -9413,6 +9481,7 @@
                   <a:srgbClr val="1F2A37"/>
                 </a:solidFill>
                 <a:latin typeface="Amiri" pitchFamily="2" charset="-78"/>
+                <a:ea typeface="Amiri" pitchFamily="2" charset="-78"/>
                 <a:cs typeface="Amiri" pitchFamily="2" charset="-78"/>
               </a:rPr>
               <a:t>تَعَلَّمْتُ يَوْمَهَا أَنَّ النَّجَاحَ لَيْسَ حَظًّا، بَلْ سَاعَاتٌ صَغِيرَةٌ مِنَ الجُهْدِ تَتَرَاكَمُ بِصَمْتٍ. وَلَوْ عُدْتُ إِلَى بِدَايَةِ تِلْكَ السَّنَةِ، لَقُلْتُ لِنَفْسِي: "رَاجِعْ قَلِيلًا كُلَّ يَوْمٍ، وَلَا تَخَفْ".</a:t>
@@ -9511,11 +9580,12 @@
               <a:buNone/>
             </a:pPr>
             <a:r>
-              <a:rPr lang="en-US" sz="950" b="1" dirty="0">
+              <a:rPr lang="ar-SA" sz="950" b="1" dirty="0">
                 <a:solidFill>
                   <a:srgbClr val="FFFFFF"/>
                 </a:solidFill>
                 <a:latin typeface="Calibri" pitchFamily="34" charset="0"/>
+                <a:ea typeface="Amiri" pitchFamily="2" charset="-78"/>
                 <a:cs typeface="Amiri" pitchFamily="2" charset="-78"/>
               </a:rPr>
               <a:t>لَمْ يَكُنْ يَوْمًا عَادِيًّا</a:t>
@@ -9576,11 +9646,12 @@
               <a:buNone/>
             </a:pPr>
             <a:r>
-              <a:rPr lang="en-US" sz="950" b="1" dirty="0">
+              <a:rPr lang="ar-SA" sz="950" b="1" dirty="0">
                 <a:solidFill>
                   <a:srgbClr val="FFFFFF"/>
                 </a:solidFill>
                 <a:latin typeface="Calibri" pitchFamily="34" charset="0"/>
+                <a:ea typeface="Amiri" pitchFamily="2" charset="-78"/>
                 <a:cs typeface="Amiri" pitchFamily="2" charset="-78"/>
               </a:rPr>
               <a:t>وَأَنَا أَمْشِي … وَكُنَّا نَتَظَاهَرُ</a:t>
@@ -9641,11 +9712,12 @@
               <a:buNone/>
             </a:pPr>
             <a:r>
-              <a:rPr lang="en-US" sz="950" b="1" dirty="0">
+              <a:rPr lang="ar-SA" sz="950" b="1" dirty="0">
                 <a:solidFill>
                   <a:srgbClr val="FFFFFF"/>
                 </a:solidFill>
                 <a:latin typeface="Calibri" pitchFamily="34" charset="0"/>
+                <a:ea typeface="Amiri" pitchFamily="2" charset="-78"/>
                 <a:cs typeface="Amiri" pitchFamily="2" charset="-78"/>
               </a:rPr>
               <a:t>بِيَدَيْنِ مُرْتَجِفَتَيْنِ</a:t>
@@ -9706,11 +9778,12 @@
               <a:buNone/>
             </a:pPr>
             <a:r>
-              <a:rPr lang="en-US" sz="950" b="1" dirty="0">
+              <a:rPr lang="ar-SA" sz="950" b="1" dirty="0">
                 <a:solidFill>
                   <a:srgbClr val="FFFFFF"/>
                 </a:solidFill>
                 <a:latin typeface="Calibri" pitchFamily="34" charset="0"/>
+                <a:ea typeface="Amiri" pitchFamily="2" charset="-78"/>
                 <a:cs typeface="Amiri" pitchFamily="2" charset="-78"/>
               </a:rPr>
               <a:t>لَيْسَ حَظًّا، بَلْ</a:t>
@@ -9844,6 +9917,7 @@
                   <a:srgbClr val="D4AF37"/>
                 </a:solidFill>
                 <a:latin typeface="Amiri" pitchFamily="2" charset="-78"/>
+                <a:ea typeface="Amiri" pitchFamily="2" charset="-78"/>
                 <a:cs typeface="Amiri" pitchFamily="2" charset="-78"/>
               </a:rPr>
               <a:t>م</a:t>
@@ -10101,6 +10175,7 @@
                   <a:srgbClr val="8A6D1E"/>
                 </a:solidFill>
                 <a:latin typeface="Amiri" pitchFamily="2" charset="-78"/>
+                <a:ea typeface="Amiri" pitchFamily="2" charset="-78"/>
                 <a:cs typeface="Amiri" pitchFamily="2" charset="-78"/>
               </a:rPr>
               <a:t>ب</a:t>
@@ -10165,6 +10240,7 @@
                   <a:srgbClr val="1B3B6F"/>
                 </a:solidFill>
                 <a:latin typeface="Amiri" pitchFamily="2" charset="-78"/>
+                <a:ea typeface="Amiri" pitchFamily="2" charset="-78"/>
                 <a:cs typeface="Amiri" pitchFamily="2" charset="-78"/>
               </a:rPr>
               <a:t>ب</a:t>
@@ -10216,6 +10292,7 @@
                   <a:srgbClr val="8A6D1E"/>
                 </a:solidFill>
                 <a:latin typeface="Amiri" pitchFamily="2" charset="-78"/>
+                <a:ea typeface="Amiri" pitchFamily="2" charset="-78"/>
                 <a:cs typeface="Amiri" pitchFamily="2" charset="-78"/>
               </a:rPr>
               <a:t>نَمُوذَجُ الإِجَابَةِ</a:t>
@@ -10329,6 +10406,7 @@
                   <a:srgbClr val="1F2A37"/>
                 </a:solidFill>
                 <a:latin typeface="Amiri" pitchFamily="2" charset="-78"/>
+                <a:ea typeface="Amiri" pitchFamily="2" charset="-78"/>
                 <a:cs typeface="Amiri" pitchFamily="2" charset="-78"/>
               </a:rPr>
               <a:t>يَحْلُمُ كَثِيرٌ مِنْ سُكَّانِ المُدُنِ بِبَيْتٍ هَادِئٍ فِي الرِّيفِ، بَيْنَمَا يَحْلُمُ شَبَابُ القُرَى بِأَضْوَاءِ المَدِينَةِ. فَهَلِ الحَيَاةُ فِي المَدِينَةِ أَفْضَلُ حَقًّا مِنَ الحَيَاةِ فِي الرِّيفِ؟</a:t>
@@ -10348,6 +10426,7 @@
                   <a:srgbClr val="1F2A37"/>
                 </a:solidFill>
                 <a:latin typeface="Amiri" pitchFamily="2" charset="-78"/>
+                <a:ea typeface="Amiri" pitchFamily="2" charset="-78"/>
                 <a:cs typeface="Amiri" pitchFamily="2" charset="-78"/>
               </a:rPr>
               <a:t>مِنْ نَاحِيَةٍ، تُقَدِّمُ المَدِينَةُ فُرَصًا أَكْثَرَ لِلدِّرَاسَةِ وَالعَمَلِ، وَمُوَاصَلَاتٍ أَسْهَلَ، وَمُسْتَشْفَيَاتٍ وَمَتَاحِفَ قَرِيبَةً. وَمِنْ نَاحِيَةٍ أُخْرَى، يُعَانِي سُكَّانُهَا مِنَ التَّلَوُّثِ وَالزِّحَامِ وَارْتِفَاعِ الأَسْعَارِ، بَيْنَمَا يَتَمَتَّعُ أَهْلُ الرِّيفِ بِهَوَاءٍ نَظِيفٍ وَعَلَاقَاتٍ أَقْوَى بَيْنَ الجِيرَانِ.</a:t>
@@ -10367,6 +10446,7 @@
                   <a:srgbClr val="1F2A37"/>
                 </a:solidFill>
                 <a:latin typeface="Amiri" pitchFamily="2" charset="-78"/>
+                <a:ea typeface="Amiri" pitchFamily="2" charset="-78"/>
                 <a:cs typeface="Amiri" pitchFamily="2" charset="-78"/>
               </a:rPr>
               <a:t>وَقَدْ لَاحَظْتُ هٰذَا الفَرْقَ فِي عَائِلَتِي؛ فَجَدِّي فِي وِيلْزَ يَعْرِفُ كُلَّ سُكَّانِ قَرْيَتِهِ بِأَسْمَائِهِمْ، وَيَتَبَادَلُ مَعَهُمُ الخُضَارَ مِنْ حَدِيقَتِهِ، أَمَّا نَحْنُ فِي مَانْشِسْتَرَ فَلَا نَعْرِفُ جِيرَانَنَا فِي الطَّابِقِ نَفْسِهِ. وَمَعَ ذٰلِكَ، فَإِنَّ جَدِّي يَحْتَاجُ إِلَى سَاعَةٍ كَامِلَةٍ لِيَصِلَ إِلَى أَقْرَبِ مُسْتَشْفًى، وَلَا يَجِدُ حَافِلَةً بَعْدَ السَّادِسَةِ مَسَاءً.</a:t>
@@ -10386,6 +10466,7 @@
                   <a:srgbClr val="1F2A37"/>
                 </a:solidFill>
                 <a:latin typeface="Amiri" pitchFamily="2" charset="-78"/>
+                <a:ea typeface="Amiri" pitchFamily="2" charset="-78"/>
                 <a:cs typeface="Amiri" pitchFamily="2" charset="-78"/>
               </a:rPr>
               <a:t>لِذٰلِكَ أَرَى أَنَّهُ لَا يُوجَدُ مَكَانٌ أَفْضَلُ لِلْجَمِيعِ، بَلْ مَكَانٌ أَنْسَبُ لِكُلِّ مَرْحَلَةٍ مِنَ العُمُرِ. فَإِذَا وَصَلَتِ الخِدْمَاتُ الجَيِّدَةُ إِلَى القُرَى، فَسَيَجْمَعُ الرِّيفُ بَيْنَ هُدُوئِهِ وَرَاحَةِ المَدِينَةِ.</a:t>
@@ -10484,11 +10565,12 @@
               <a:buNone/>
             </a:pPr>
             <a:r>
-              <a:rPr lang="en-US" sz="950" b="1" dirty="0">
+              <a:rPr lang="ar-SA" sz="950" b="1" dirty="0">
                 <a:solidFill>
                   <a:srgbClr val="FFFFFF"/>
                 </a:solidFill>
                 <a:latin typeface="Calibri" pitchFamily="34" charset="0"/>
+                <a:ea typeface="Amiri" pitchFamily="2" charset="-78"/>
                 <a:cs typeface="Amiri" pitchFamily="2" charset="-78"/>
               </a:rPr>
               <a:t>بَيْنَمَا يَحْلُمُ</a:t>
@@ -10549,11 +10631,12 @@
               <a:buNone/>
             </a:pPr>
             <a:r>
-              <a:rPr lang="en-US" sz="950" b="1" dirty="0">
+              <a:rPr lang="ar-SA" sz="950" b="1" dirty="0">
                 <a:solidFill>
                   <a:srgbClr val="FFFFFF"/>
                 </a:solidFill>
                 <a:latin typeface="Calibri" pitchFamily="34" charset="0"/>
+                <a:ea typeface="Amiri" pitchFamily="2" charset="-78"/>
                 <a:cs typeface="Amiri" pitchFamily="2" charset="-78"/>
               </a:rPr>
               <a:t>يُعَانِي … مِنَ</a:t>
@@ -10614,11 +10697,12 @@
               <a:buNone/>
             </a:pPr>
             <a:r>
-              <a:rPr lang="en-US" sz="950" b="1" dirty="0">
+              <a:rPr lang="ar-SA" sz="950" b="1" dirty="0">
                 <a:solidFill>
                   <a:srgbClr val="FFFFFF"/>
                 </a:solidFill>
                 <a:latin typeface="Calibri" pitchFamily="34" charset="0"/>
+                <a:ea typeface="Amiri" pitchFamily="2" charset="-78"/>
                 <a:cs typeface="Amiri" pitchFamily="2" charset="-78"/>
               </a:rPr>
               <a:t>أَمَّا نَحْنُ … فَلَا</a:t>
@@ -10679,11 +10763,12 @@
               <a:buNone/>
             </a:pPr>
             <a:r>
-              <a:rPr lang="en-US" sz="950" b="1" dirty="0">
+              <a:rPr lang="ar-SA" sz="950" b="1" dirty="0">
                 <a:solidFill>
                   <a:srgbClr val="FFFFFF"/>
                 </a:solidFill>
                 <a:latin typeface="Calibri" pitchFamily="34" charset="0"/>
+                <a:ea typeface="Amiri" pitchFamily="2" charset="-78"/>
                 <a:cs typeface="Amiri" pitchFamily="2" charset="-78"/>
               </a:rPr>
               <a:t>لَا يُوجَدُ … بَلْ</a:t>
@@ -10817,6 +10902,7 @@
                   <a:srgbClr val="D4AF37"/>
                 </a:solidFill>
                 <a:latin typeface="Amiri" pitchFamily="2" charset="-78"/>
+                <a:ea typeface="Amiri" pitchFamily="2" charset="-78"/>
                 <a:cs typeface="Amiri" pitchFamily="2" charset="-78"/>
               </a:rPr>
               <a:t>م</a:t>
@@ -11137,6 +11223,7 @@
                   <a:srgbClr val="8A6D1E"/>
                 </a:solidFill>
                 <a:latin typeface="Amiri" pitchFamily="2" charset="-78"/>
+                <a:ea typeface="Amiri" pitchFamily="2" charset="-78"/>
                 <a:cs typeface="Amiri" pitchFamily="2" charset="-78"/>
               </a:rPr>
               <a:t>قَيِّمْ عَمَلَكَ</a:t>
@@ -12381,6 +12468,7 @@
                   <a:srgbClr val="FFFFFF"/>
                 </a:solidFill>
                 <a:latin typeface="Amiri" pitchFamily="2" charset="-78"/>
+                <a:ea typeface="Amiri" pitchFamily="2" charset="-78"/>
                 <a:cs typeface="Amiri" pitchFamily="2" charset="-78"/>
               </a:rPr>
               <a:t>أَحْسَنْتُمْ! إِلَى اللِّقَاءِ</a:t>
@@ -12533,6 +12621,7 @@
                   <a:srgbClr val="D4AF37"/>
                 </a:solidFill>
                 <a:latin typeface="Amiri" pitchFamily="2" charset="-78"/>
+                <a:ea typeface="Amiri" pitchFamily="2" charset="-78"/>
                 <a:cs typeface="Amiri" pitchFamily="2" charset="-78"/>
               </a:rPr>
               <a:t>وَرْشَةُ التَّدْرِيبِ</a:t>
@@ -12666,6 +12755,7 @@
                   <a:srgbClr val="D4AF37"/>
                 </a:solidFill>
                 <a:latin typeface="Amiri" pitchFamily="2" charset="-78"/>
+                <a:ea typeface="Amiri" pitchFamily="2" charset="-78"/>
                 <a:cs typeface="Amiri" pitchFamily="2" charset="-78"/>
               </a:rPr>
               <a:t>م</a:t>
@@ -12986,6 +13076,7 @@
                   <a:srgbClr val="8A6D1E"/>
                 </a:solidFill>
                 <a:latin typeface="Amiri" pitchFamily="2" charset="-78"/>
+                <a:ea typeface="Amiri" pitchFamily="2" charset="-78"/>
                 <a:cs typeface="Amiri" pitchFamily="2" charset="-78"/>
               </a:rPr>
               <a:t>آدَابُ الصَّفِّ</a:t>
@@ -14517,6 +14608,7 @@
                   <a:srgbClr val="D4AF37"/>
                 </a:solidFill>
                 <a:latin typeface="Amiri" pitchFamily="2" charset="-78"/>
+                <a:ea typeface="Amiri" pitchFamily="2" charset="-78"/>
                 <a:cs typeface="Amiri" pitchFamily="2" charset="-78"/>
               </a:rPr>
               <a:t>م</a:t>
@@ -14837,6 +14929,7 @@
                   <a:srgbClr val="8A6D1E"/>
                 </a:solidFill>
                 <a:latin typeface="Amiri" pitchFamily="2" charset="-78"/>
+                <a:ea typeface="Amiri" pitchFamily="2" charset="-78"/>
                 <a:cs typeface="Amiri" pitchFamily="2" charset="-78"/>
               </a:rPr>
               <a:t>خَرِيطَةُ الوَرْشَةِ</a:t>
@@ -15151,6 +15244,7 @@
                   <a:srgbClr val="1B3B6F"/>
                 </a:solidFill>
                 <a:latin typeface="Amiri" pitchFamily="2" charset="-78"/>
+                <a:ea typeface="Amiri" pitchFamily="2" charset="-78"/>
                 <a:cs typeface="Amiri" pitchFamily="2" charset="-78"/>
               </a:rPr>
               <a:t>كَيْفَ</a:t>
@@ -15427,6 +15521,7 @@
                   <a:srgbClr val="1E6B52"/>
                 </a:solidFill>
                 <a:latin typeface="Amiri" pitchFamily="2" charset="-78"/>
+                <a:ea typeface="Amiri" pitchFamily="2" charset="-78"/>
                 <a:cs typeface="Amiri" pitchFamily="2" charset="-78"/>
               </a:rPr>
               <a:t>الاسْتِمَارَةُ</a:t>
@@ -15703,6 +15798,7 @@
                   <a:srgbClr val="1E6B52"/>
                 </a:solidFill>
                 <a:latin typeface="Amiri" pitchFamily="2" charset="-78"/>
+                <a:ea typeface="Amiri" pitchFamily="2" charset="-78"/>
                 <a:cs typeface="Amiri" pitchFamily="2" charset="-78"/>
               </a:rPr>
               <a:t>الرِّسَالَةُ</a:t>
@@ -15979,6 +16075,7 @@
                   <a:srgbClr val="1E6B52"/>
                 </a:solidFill>
                 <a:latin typeface="Amiri" pitchFamily="2" charset="-78"/>
+                <a:ea typeface="Amiri" pitchFamily="2" charset="-78"/>
                 <a:cs typeface="Amiri" pitchFamily="2" charset="-78"/>
               </a:rPr>
               <a:t>المَقَالُ</a:t>
@@ -16255,6 +16352,7 @@
                   <a:srgbClr val="8A6D1E"/>
                 </a:solidFill>
                 <a:latin typeface="Amiri" pitchFamily="2" charset="-78"/>
+                <a:ea typeface="Amiri" pitchFamily="2" charset="-78"/>
                 <a:cs typeface="Amiri" pitchFamily="2" charset="-78"/>
               </a:rPr>
               <a:t>قَيِّمْ</a:t>
@@ -16498,6 +16596,7 @@
                   <a:srgbClr val="D4AF37"/>
                 </a:solidFill>
                 <a:latin typeface="Amiri" pitchFamily="2" charset="-78"/>
+                <a:ea typeface="Amiri" pitchFamily="2" charset="-78"/>
                 <a:cs typeface="Amiri" pitchFamily="2" charset="-78"/>
               </a:rPr>
               <a:t>م</a:t>
@@ -16818,6 +16917,7 @@
                   <a:srgbClr val="8A6D1E"/>
                 </a:solidFill>
                 <a:latin typeface="Amiri" pitchFamily="2" charset="-78"/>
+                <a:ea typeface="Amiri" pitchFamily="2" charset="-78"/>
                 <a:cs typeface="Amiri" pitchFamily="2" charset="-78"/>
               </a:rPr>
               <a:t>امْتِحَانُ الكِتَابَةِ</a:t>
@@ -17442,6 +17542,7 @@
                   <a:srgbClr val="1B3B6F"/>
                 </a:solidFill>
                 <a:latin typeface="Amiri" pitchFamily="2" charset="-78"/>
+                <a:ea typeface="Amiri" pitchFamily="2" charset="-78"/>
                 <a:cs typeface="Amiri" pitchFamily="2" charset="-78"/>
               </a:rPr>
               <a:t>سَافَرْنَا بِالقِطَارِ، وَاسْتَغْرَقَتِ الرِّحْلَةُ ثَلَاثَ سَاعَاتٍ</a:t>
@@ -17541,6 +17642,7 @@
                   <a:srgbClr val="1B3B6F"/>
                 </a:solidFill>
                 <a:latin typeface="Amiri" pitchFamily="2" charset="-78"/>
+                <a:ea typeface="Amiri" pitchFamily="2" charset="-78"/>
                 <a:cs typeface="Amiri" pitchFamily="2" charset="-78"/>
               </a:rPr>
               <a:t>فِيهَا جِبَالٌ خَضْرَاءُ وَنَهْرٌ جَمِيلٌ</a:t>
@@ -17640,6 +17742,7 @@
                   <a:srgbClr val="1B3B6F"/>
                 </a:solidFill>
                 <a:latin typeface="Amiri" pitchFamily="2" charset="-78"/>
+                <a:ea typeface="Amiri" pitchFamily="2" charset="-78"/>
                 <a:cs typeface="Amiri" pitchFamily="2" charset="-78"/>
               </a:rPr>
               <a:t>الحَيَاةُ فِي القَرْيَةِ أَهْدَأُ مِنَ المَدِينَةِ، لٰكِنَّهَا …</a:t>
@@ -17811,6 +17914,7 @@
                   <a:srgbClr val="D4AF37"/>
                 </a:solidFill>
                 <a:latin typeface="Amiri" pitchFamily="2" charset="-78"/>
+                <a:ea typeface="Amiri" pitchFamily="2" charset="-78"/>
                 <a:cs typeface="Amiri" pitchFamily="2" charset="-78"/>
               </a:rPr>
               <a:t>م</a:t>
@@ -18131,6 +18235,7 @@
                   <a:srgbClr val="8A6D1E"/>
                 </a:solidFill>
                 <a:latin typeface="Amiri" pitchFamily="2" charset="-78"/>
+                <a:ea typeface="Amiri" pitchFamily="2" charset="-78"/>
                 <a:cs typeface="Amiri" pitchFamily="2" charset="-78"/>
               </a:rPr>
               <a:t>اسْتِمَارَةُ المَفْقُودَاتِ</a:t>
@@ -18487,6 +18592,7 @@
                   <a:srgbClr val="1B3B6F"/>
                 </a:solidFill>
                 <a:latin typeface="Amiri" pitchFamily="2" charset="-78"/>
+                <a:ea typeface="Amiri" pitchFamily="2" charset="-78"/>
                 <a:cs typeface="Amiri" pitchFamily="2" charset="-78"/>
               </a:rPr>
               <a:t>الاسْمُ</a:t>
@@ -18731,6 +18837,7 @@
                   <a:srgbClr val="1B3B6F"/>
                 </a:solidFill>
                 <a:latin typeface="Amiri" pitchFamily="2" charset="-78"/>
+                <a:ea typeface="Amiri" pitchFamily="2" charset="-78"/>
                 <a:cs typeface="Amiri" pitchFamily="2" charset="-78"/>
               </a:rPr>
               <a:t>الشَّيْءُ المَفْقُودُ</a:t>
@@ -18975,6 +19082,7 @@
                   <a:srgbClr val="1B3B6F"/>
                 </a:solidFill>
                 <a:latin typeface="Amiri" pitchFamily="2" charset="-78"/>
+                <a:ea typeface="Amiri" pitchFamily="2" charset="-78"/>
                 <a:cs typeface="Amiri" pitchFamily="2" charset="-78"/>
               </a:rPr>
               <a:t>اللَّوْنُ</a:t>
@@ -19219,6 +19327,7 @@
                   <a:srgbClr val="1B3B6F"/>
                 </a:solidFill>
                 <a:latin typeface="Amiri" pitchFamily="2" charset="-78"/>
+                <a:ea typeface="Amiri" pitchFamily="2" charset="-78"/>
                 <a:cs typeface="Amiri" pitchFamily="2" charset="-78"/>
               </a:rPr>
               <a:t>المَكَانُ</a:t>
@@ -19463,6 +19572,7 @@
                   <a:srgbClr val="1B3B6F"/>
                 </a:solidFill>
                 <a:latin typeface="Amiri" pitchFamily="2" charset="-78"/>
+                <a:ea typeface="Amiri" pitchFamily="2" charset="-78"/>
                 <a:cs typeface="Amiri" pitchFamily="2" charset="-78"/>
               </a:rPr>
               <a:t>التَّارِيخُ</a:t>
@@ -19707,6 +19817,7 @@
                   <a:srgbClr val="1B3B6F"/>
                 </a:solidFill>
                 <a:latin typeface="Amiri" pitchFamily="2" charset="-78"/>
+                <a:ea typeface="Amiri" pitchFamily="2" charset="-78"/>
                 <a:cs typeface="Amiri" pitchFamily="2" charset="-78"/>
               </a:rPr>
               <a:t>رَقْمُ الهَاتِفِ</a:t>
@@ -19951,6 +20062,7 @@
                   <a:srgbClr val="1B3B6F"/>
                 </a:solidFill>
                 <a:latin typeface="Amiri" pitchFamily="2" charset="-78"/>
+                <a:ea typeface="Amiri" pitchFamily="2" charset="-78"/>
                 <a:cs typeface="Amiri" pitchFamily="2" charset="-78"/>
               </a:rPr>
               <a:t>مَا فِيهَا</a:t>
@@ -20130,6 +20242,7 @@
                   <a:srgbClr val="1B3B6F"/>
                 </a:solidFill>
                 <a:latin typeface="Amiri" pitchFamily="2" charset="-78"/>
+                <a:ea typeface="Amiri" pitchFamily="2" charset="-78"/>
                 <a:cs typeface="Amiri" pitchFamily="2" charset="-78"/>
               </a:rPr>
               <a:t>جُمْلَةٌ: صِفِ الحَقِيبَةَ</a:t>
@@ -20339,6 +20452,7 @@
                   <a:srgbClr val="D4AF37"/>
                 </a:solidFill>
                 <a:latin typeface="Amiri" pitchFamily="2" charset="-78"/>
+                <a:ea typeface="Amiri" pitchFamily="2" charset="-78"/>
                 <a:cs typeface="Amiri" pitchFamily="2" charset="-78"/>
               </a:rPr>
               <a:t>م</a:t>
@@ -20659,6 +20773,7 @@
                   <a:srgbClr val="8A6D1E"/>
                 </a:solidFill>
                 <a:latin typeface="Amiri" pitchFamily="2" charset="-78"/>
+                <a:ea typeface="Amiri" pitchFamily="2" charset="-78"/>
                 <a:cs typeface="Amiri" pitchFamily="2" charset="-78"/>
               </a:rPr>
               <a:t>نَمُوذَجُ الإِجَابَةِ</a:t>
@@ -20977,6 +21092,7 @@
                   <a:srgbClr val="1B3B6F"/>
                 </a:solidFill>
                 <a:latin typeface="Amiri" pitchFamily="2" charset="-78"/>
+                <a:ea typeface="Amiri" pitchFamily="2" charset="-78"/>
                 <a:cs typeface="Amiri" pitchFamily="2" charset="-78"/>
               </a:rPr>
               <a:t>أُسَامَةُ إِبْرَاهِيمُ</a:t>
@@ -21015,6 +21131,7 @@
                   <a:srgbClr val="1B3B6F"/>
                 </a:solidFill>
                 <a:latin typeface="Amiri" pitchFamily="2" charset="-78"/>
+                <a:ea typeface="Amiri" pitchFamily="2" charset="-78"/>
                 <a:cs typeface="Amiri" pitchFamily="2" charset="-78"/>
               </a:rPr>
               <a:t>الاسْمُ</a:t>
@@ -21156,6 +21273,7 @@
                   <a:srgbClr val="1B3B6F"/>
                 </a:solidFill>
                 <a:latin typeface="Amiri" pitchFamily="2" charset="-78"/>
+                <a:ea typeface="Amiri" pitchFamily="2" charset="-78"/>
                 <a:cs typeface="Amiri" pitchFamily="2" charset="-78"/>
               </a:rPr>
               <a:t>حَقِيبَةُ ظَهْرٍ</a:t>
@@ -21194,6 +21312,7 @@
                   <a:srgbClr val="1B3B6F"/>
                 </a:solidFill>
                 <a:latin typeface="Amiri" pitchFamily="2" charset="-78"/>
+                <a:ea typeface="Amiri" pitchFamily="2" charset="-78"/>
                 <a:cs typeface="Amiri" pitchFamily="2" charset="-78"/>
               </a:rPr>
               <a:t>الشَّيْءُ المَفْقُودُ</a:t>
@@ -21335,6 +21454,7 @@
                   <a:srgbClr val="1B3B6F"/>
                 </a:solidFill>
                 <a:latin typeface="Amiri" pitchFamily="2" charset="-78"/>
+                <a:ea typeface="Amiri" pitchFamily="2" charset="-78"/>
                 <a:cs typeface="Amiri" pitchFamily="2" charset="-78"/>
               </a:rPr>
               <a:t>زَرْقَاءُ</a:t>
@@ -21373,6 +21493,7 @@
                   <a:srgbClr val="1B3B6F"/>
                 </a:solidFill>
                 <a:latin typeface="Amiri" pitchFamily="2" charset="-78"/>
+                <a:ea typeface="Amiri" pitchFamily="2" charset="-78"/>
                 <a:cs typeface="Amiri" pitchFamily="2" charset="-78"/>
               </a:rPr>
               <a:t>اللَّوْنُ</a:t>
@@ -21514,6 +21635,7 @@
                   <a:srgbClr val="1B3B6F"/>
                 </a:solidFill>
                 <a:latin typeface="Amiri" pitchFamily="2" charset="-78"/>
+                <a:ea typeface="Amiri" pitchFamily="2" charset="-78"/>
                 <a:cs typeface="Amiri" pitchFamily="2" charset="-78"/>
               </a:rPr>
               <a:t>فِي القِطَارِ إِلَى وِيلْزَ</a:t>
@@ -21552,6 +21674,7 @@
                   <a:srgbClr val="1B3B6F"/>
                 </a:solidFill>
                 <a:latin typeface="Amiri" pitchFamily="2" charset="-78"/>
+                <a:ea typeface="Amiri" pitchFamily="2" charset="-78"/>
                 <a:cs typeface="Amiri" pitchFamily="2" charset="-78"/>
               </a:rPr>
               <a:t>المَكَانُ</a:t>
@@ -21693,6 +21816,7 @@
                   <a:srgbClr val="1B3B6F"/>
                 </a:solidFill>
                 <a:latin typeface="Amiri" pitchFamily="2" charset="-78"/>
+                <a:ea typeface="Amiri" pitchFamily="2" charset="-78"/>
                 <a:cs typeface="Amiri" pitchFamily="2" charset="-78"/>
               </a:rPr>
               <a:t>السَّبْتُ، الخَامِسُ مِنْ مَايُو</a:t>
@@ -21731,6 +21855,7 @@
                   <a:srgbClr val="1B3B6F"/>
                 </a:solidFill>
                 <a:latin typeface="Amiri" pitchFamily="2" charset="-78"/>
+                <a:ea typeface="Amiri" pitchFamily="2" charset="-78"/>
                 <a:cs typeface="Amiri" pitchFamily="2" charset="-78"/>
               </a:rPr>
               <a:t>التَّارِيخُ</a:t>
@@ -21872,6 +21997,7 @@
                   <a:srgbClr val="1B3B6F"/>
                 </a:solidFill>
                 <a:latin typeface="Amiri" pitchFamily="2" charset="-78"/>
+                <a:ea typeface="Amiri" pitchFamily="2" charset="-78"/>
                 <a:cs typeface="Amiri" pitchFamily="2" charset="-78"/>
               </a:rPr>
               <a:t>٠٧٧٠٠٩٠٠٤٥٦</a:t>
@@ -21910,6 +22036,7 @@
                   <a:srgbClr val="1B3B6F"/>
                 </a:solidFill>
                 <a:latin typeface="Amiri" pitchFamily="2" charset="-78"/>
+                <a:ea typeface="Amiri" pitchFamily="2" charset="-78"/>
                 <a:cs typeface="Amiri" pitchFamily="2" charset="-78"/>
               </a:rPr>
               <a:t>رَقْمُ الهَاتِفِ</a:t>
@@ -22051,6 +22178,7 @@
                   <a:srgbClr val="1B3B6F"/>
                 </a:solidFill>
                 <a:latin typeface="Amiri" pitchFamily="2" charset="-78"/>
+                <a:ea typeface="Amiri" pitchFamily="2" charset="-78"/>
                 <a:cs typeface="Amiri" pitchFamily="2" charset="-78"/>
               </a:rPr>
               <a:t>كُتُبٌ مَدْرَسِيَّةٌ وَقَارُورَةُ مَاءٍ</a:t>
@@ -22089,6 +22217,7 @@
                   <a:srgbClr val="1B3B6F"/>
                 </a:solidFill>
                 <a:latin typeface="Amiri" pitchFamily="2" charset="-78"/>
+                <a:ea typeface="Amiri" pitchFamily="2" charset="-78"/>
                 <a:cs typeface="Amiri" pitchFamily="2" charset="-78"/>
               </a:rPr>
               <a:t>مَا فِيهَا</a:t>
@@ -22230,6 +22359,7 @@
                   <a:srgbClr val="1B3B6F"/>
                 </a:solidFill>
                 <a:latin typeface="Amiri" pitchFamily="2" charset="-78"/>
+                <a:ea typeface="Amiri" pitchFamily="2" charset="-78"/>
                 <a:cs typeface="Amiri" pitchFamily="2" charset="-78"/>
               </a:rPr>
               <a:t>هِيَ حَقِيبَةٌ زَرْقَاءُ كَبِيرَةٌ مِنَ القُمَاشِ، وَعَلَيْهَا اسْمِي بِاللَّوْنِ الأَبْيَضِ.</a:t>
@@ -22268,6 +22398,7 @@
                   <a:srgbClr val="1B3B6F"/>
                 </a:solidFill>
                 <a:latin typeface="Amiri" pitchFamily="2" charset="-78"/>
+                <a:ea typeface="Amiri" pitchFamily="2" charset="-78"/>
                 <a:cs typeface="Amiri" pitchFamily="2" charset="-78"/>
               </a:rPr>
               <a:t>جُمْلَةٌ: صِفِ الحَقِيبَةَ</a:t>
@@ -22477,6 +22608,7 @@
                   <a:srgbClr val="D4AF37"/>
                 </a:solidFill>
                 <a:latin typeface="Amiri" pitchFamily="2" charset="-78"/>
+                <a:ea typeface="Amiri" pitchFamily="2" charset="-78"/>
                 <a:cs typeface="Amiri" pitchFamily="2" charset="-78"/>
               </a:rPr>
               <a:t>م</a:t>
@@ -22797,6 +22929,7 @@
                   <a:srgbClr val="8A6D1E"/>
                 </a:solidFill>
                 <a:latin typeface="Amiri" pitchFamily="2" charset="-78"/>
+                <a:ea typeface="Amiri" pitchFamily="2" charset="-78"/>
                 <a:cs typeface="Amiri" pitchFamily="2" charset="-78"/>
               </a:rPr>
               <a:t>عُطْلَةٌ عِنْدَ جَدِّي وَجَدَّتِي</a:t>
@@ -23272,6 +23405,7 @@
                   <a:srgbClr val="1B3B6F"/>
                 </a:solidFill>
                 <a:latin typeface="Amiri" pitchFamily="2" charset="-78"/>
+                <a:ea typeface="Amiri" pitchFamily="2" charset="-78"/>
                 <a:cs typeface="Amiri" pitchFamily="2" charset="-78"/>
               </a:rPr>
               <a:t>سَافَرْنَا بِالقِطَارِ … وَاسْتَغْرَقَتِ الرِّحْلَةُ …</a:t>
@@ -23348,6 +23482,7 @@
                   <a:srgbClr val="1B3B6F"/>
                 </a:solidFill>
                 <a:latin typeface="Amiri" pitchFamily="2" charset="-78"/>
+                <a:ea typeface="Amiri" pitchFamily="2" charset="-78"/>
                 <a:cs typeface="Amiri" pitchFamily="2" charset="-78"/>
               </a:rPr>
               <a:t>القَرْيَةُ … وَفِيهَا …</a:t>
@@ -23424,6 +23559,7 @@
                   <a:srgbClr val="1B3B6F"/>
                 </a:solidFill>
                 <a:latin typeface="Amiri" pitchFamily="2" charset="-78"/>
+                <a:ea typeface="Amiri" pitchFamily="2" charset="-78"/>
                 <a:cs typeface="Amiri" pitchFamily="2" charset="-78"/>
               </a:rPr>
               <a:t>كَانَ الجَوُّ … لٰكِنَّنَا …</a:t>
@@ -23500,6 +23636,7 @@
                   <a:srgbClr val="1B3B6F"/>
                 </a:solidFill>
                 <a:latin typeface="Amiri" pitchFamily="2" charset="-78"/>
+                <a:ea typeface="Amiri" pitchFamily="2" charset="-78"/>
                 <a:cs typeface="Amiri" pitchFamily="2" charset="-78"/>
               </a:rPr>
               <a:t>الحَيَاةُ فِي القَرْيَةِ أَهْدَأُ مِنْ …</a:t>
@@ -23671,6 +23808,7 @@
                   <a:srgbClr val="D4AF37"/>
                 </a:solidFill>
                 <a:latin typeface="Amiri" pitchFamily="2" charset="-78"/>
+                <a:ea typeface="Amiri" pitchFamily="2" charset="-78"/>
                 <a:cs typeface="Amiri" pitchFamily="2" charset="-78"/>
               </a:rPr>
               <a:t>م</a:t>
@@ -23991,6 +24129,7 @@
                   <a:srgbClr val="8A6D1E"/>
                 </a:solidFill>
                 <a:latin typeface="Amiri" pitchFamily="2" charset="-78"/>
+                <a:ea typeface="Amiri" pitchFamily="2" charset="-78"/>
                 <a:cs typeface="Amiri" pitchFamily="2" charset="-78"/>
               </a:rPr>
               <a:t>نَصُّ السُّؤَالِ</a:t>
@@ -24271,6 +24410,7 @@
                   <a:srgbClr val="1B3B6F"/>
                 </a:solidFill>
                 <a:latin typeface="Amiri" pitchFamily="2" charset="-78"/>
+                <a:ea typeface="Amiri" pitchFamily="2" charset="-78"/>
                 <a:cs typeface="Amiri" pitchFamily="2" charset="-78"/>
               </a:rPr>
               <a:t>اكْتُبْ رِسَالَةً إِلَى صَدِيقِكَ عَنْ عُطْلَةٍ فِي الرِّيفِ (٨٠–٩٠ كَلِمَةً).</a:t>
@@ -24412,6 +24552,7 @@
                   <a:srgbClr val="1B3B6F"/>
                 </a:solidFill>
                 <a:latin typeface="Amiri" pitchFamily="2" charset="-78"/>
+                <a:ea typeface="Amiri" pitchFamily="2" charset="-78"/>
                 <a:cs typeface="Amiri" pitchFamily="2" charset="-78"/>
               </a:rPr>
               <a:t>أَيْنَ ذَهَبْتَ؟ وَكَيْفَ سَافَرْتَ؟</a:t>
@@ -24553,6 +24694,7 @@
                   <a:srgbClr val="1B3B6F"/>
                 </a:solidFill>
                 <a:latin typeface="Amiri" pitchFamily="2" charset="-78"/>
+                <a:ea typeface="Amiri" pitchFamily="2" charset="-78"/>
                 <a:cs typeface="Amiri" pitchFamily="2" charset="-78"/>
               </a:rPr>
               <a:t>صِفِ المَكَانَ وَالطَّقْسَ.</a:t>
@@ -24694,6 +24836,7 @@
                   <a:srgbClr val="1B3B6F"/>
                 </a:solidFill>
                 <a:latin typeface="Amiri" pitchFamily="2" charset="-78"/>
+                <a:ea typeface="Amiri" pitchFamily="2" charset="-78"/>
                 <a:cs typeface="Amiri" pitchFamily="2" charset="-78"/>
               </a:rPr>
               <a:t>مَاذَا فَعَلْتَ مَعَ عَائِلَتِكَ؟</a:t>
@@ -24835,6 +24978,7 @@
                   <a:srgbClr val="1B3B6F"/>
                 </a:solidFill>
                 <a:latin typeface="Amiri" pitchFamily="2" charset="-78"/>
+                <a:ea typeface="Amiri" pitchFamily="2" charset="-78"/>
                 <a:cs typeface="Amiri" pitchFamily="2" charset="-78"/>
               </a:rPr>
               <a:t>مَا رَأْيُكَ فِي الحَيَاةِ فِي الرِّيفِ؟ وَمَا خِطَطُكَ؟ وَاسْأَلْ صَدِيقَكَ سُؤَالًا.</a:t>
@@ -25044,6 +25188,7 @@
                   <a:srgbClr val="D4AF37"/>
                 </a:solidFill>
                 <a:latin typeface="Amiri" pitchFamily="2" charset="-78"/>
+                <a:ea typeface="Amiri" pitchFamily="2" charset="-78"/>
                 <a:cs typeface="Amiri" pitchFamily="2" charset="-78"/>
               </a:rPr>
               <a:t>م</a:t>
@@ -25364,6 +25509,7 @@
                   <a:srgbClr val="8A6D1E"/>
                 </a:solidFill>
                 <a:latin typeface="Amiri" pitchFamily="2" charset="-78"/>
+                <a:ea typeface="Amiri" pitchFamily="2" charset="-78"/>
                 <a:cs typeface="Amiri" pitchFamily="2" charset="-78"/>
               </a:rPr>
               <a:t>قَوَالِبُ الكِتَابَةِ</a:t>
@@ -25644,6 +25790,7 @@
                   <a:srgbClr val="1B3B6F"/>
                 </a:solidFill>
                 <a:latin typeface="Amiri" pitchFamily="2" charset="-78"/>
+                <a:ea typeface="Amiri" pitchFamily="2" charset="-78"/>
                 <a:cs typeface="Amiri" pitchFamily="2" charset="-78"/>
               </a:rPr>
               <a:t>مَرْحَبًا يَا ______ ، كَيْفَ حَالُكَ؟</a:t>
@@ -25850,6 +25997,7 @@
                   <a:srgbClr val="1B3B6F"/>
                 </a:solidFill>
                 <a:latin typeface="Amiri" pitchFamily="2" charset="-78"/>
+                <a:ea typeface="Amiri" pitchFamily="2" charset="-78"/>
                 <a:cs typeface="Amiri" pitchFamily="2" charset="-78"/>
               </a:rPr>
               <a:t>قَضَيْتُ … عِنْدَ ______ فِي ______ . سَافَرْنَا ______ .</a:t>
@@ -26056,6 +26204,7 @@
                   <a:srgbClr val="1B3B6F"/>
                 </a:solidFill>
                 <a:latin typeface="Amiri" pitchFamily="2" charset="-78"/>
+                <a:ea typeface="Amiri" pitchFamily="2" charset="-78"/>
                 <a:cs typeface="Amiri" pitchFamily="2" charset="-78"/>
               </a:rPr>
               <a:t>القَرْيَةُ ______ ، وَفِيهَا ______ . كَانَ الجَوُّ ______ .</a:t>
@@ -26262,6 +26411,7 @@
                   <a:srgbClr val="1B3B6F"/>
                 </a:solidFill>
                 <a:latin typeface="Amiri" pitchFamily="2" charset="-78"/>
+                <a:ea typeface="Amiri" pitchFamily="2" charset="-78"/>
                 <a:cs typeface="Amiri" pitchFamily="2" charset="-78"/>
               </a:rPr>
               <a:t>يَوْمَ السَّبْتِ ______ ، وَفِي المَسَاءِ ______ .</a:t>
@@ -26468,6 +26618,7 @@
                   <a:srgbClr val="1B3B6F"/>
                 </a:solidFill>
                 <a:latin typeface="Amiri" pitchFamily="2" charset="-78"/>
+                <a:ea typeface="Amiri" pitchFamily="2" charset="-78"/>
                 <a:cs typeface="Amiri" pitchFamily="2" charset="-78"/>
               </a:rPr>
               <a:t>الحَيَاةُ فِي القَرْيَةِ ______ مِنَ المَدِينَةِ. سَأَعُودُ ______ .</a:t>
@@ -26674,6 +26825,7 @@
                   <a:srgbClr val="1B3B6F"/>
                 </a:solidFill>
                 <a:latin typeface="Amiri" pitchFamily="2" charset="-78"/>
+                <a:ea typeface="Amiri" pitchFamily="2" charset="-78"/>
                 <a:cs typeface="Amiri" pitchFamily="2" charset="-78"/>
               </a:rPr>
               <a:t>وَأَنْتَ، ______ ؟ إِلَى اللِّقَاءِ.</a:t>
@@ -26913,13 +27065,9 @@
     <a:fontScheme name="Office">
       <a:majorFont>
         <a:latin typeface="Calibri Light" panose="020F0302020204030204"/>
-        <a:ea typeface=""/>
-        <a:cs typeface=""/>
-        <a:font script="Jpan" typeface="游ゴシック Light"/>
-        <a:font script="Hang" typeface="맑은 고딕"/>
-        <a:font script="Hans" typeface="等线 Light"/>
-        <a:font script="Hant" typeface="新細明體"/>
-        <a:font script="Arab" typeface="Times New Roman"/>
+        <a:ea typeface="Amiri" pitchFamily="2" charset="-78"/>
+        <a:cs typeface="Amiri" pitchFamily="2" charset="-78"/>
+        <a:font script="Arab" typeface="Amiri"/>
         <a:font script="Hebr" typeface="Times New Roman"/>
         <a:font script="Thai" typeface="Angsana New"/>
         <a:font script="Ethi" typeface="Nyala"/>
@@ -26965,13 +27113,9 @@
       </a:majorFont>
       <a:minorFont>
         <a:latin typeface="Calibri" panose="020F0502020204030204"/>
-        <a:ea typeface=""/>
-        <a:cs typeface=""/>
-        <a:font script="Jpan" typeface="游ゴシック"/>
-        <a:font script="Hang" typeface="맑은 고딕"/>
-        <a:font script="Hans" typeface="等线"/>
-        <a:font script="Hant" typeface="新細明體"/>
-        <a:font script="Arab" typeface="Arial"/>
+        <a:ea typeface="Amiri" pitchFamily="2" charset="-78"/>
+        <a:cs typeface="Amiri" pitchFamily="2" charset="-78"/>
+        <a:font script="Arab" typeface="Amiri"/>
         <a:font script="Hebr" typeface="Arial"/>
         <a:font script="Thai" typeface="Cordia New"/>
         <a:font script="Ethi" typeface="Nyala"/>

--- a/Final_Revision/Exam_Practice/FR-L05_Writing_Workshop_Mixed_Mock_Exam_1.pptx
+++ b/Final_Revision/Exam_Practice/FR-L05_Writing_Workshop_Mixed_Mock_Exam_1.pptx
@@ -3848,7 +3848,7 @@
                 <a:solidFill>
                   <a:srgbClr val="FFFFFF"/>
                 </a:solidFill>
-                <a:latin typeface="Calibri" pitchFamily="34" charset="0"/>
+                <a:latin typeface="Amiri" pitchFamily="2" charset="-78"/>
                 <a:ea typeface="Amiri" pitchFamily="2" charset="-78"/>
                 <a:cs typeface="Amiri" pitchFamily="2" charset="-78"/>
               </a:rPr>
@@ -3914,7 +3914,7 @@
                 <a:solidFill>
                   <a:srgbClr val="FFFFFF"/>
                 </a:solidFill>
-                <a:latin typeface="Calibri" pitchFamily="34" charset="0"/>
+                <a:latin typeface="Amiri" pitchFamily="2" charset="-78"/>
                 <a:ea typeface="Amiri" pitchFamily="2" charset="-78"/>
                 <a:cs typeface="Amiri" pitchFamily="2" charset="-78"/>
               </a:rPr>
@@ -3980,7 +3980,7 @@
                 <a:solidFill>
                   <a:srgbClr val="FFFFFF"/>
                 </a:solidFill>
-                <a:latin typeface="Calibri" pitchFamily="34" charset="0"/>
+                <a:latin typeface="Amiri" pitchFamily="2" charset="-78"/>
                 <a:ea typeface="Amiri" pitchFamily="2" charset="-78"/>
                 <a:cs typeface="Amiri" pitchFamily="2" charset="-78"/>
               </a:rPr>
@@ -4046,7 +4046,7 @@
                 <a:solidFill>
                   <a:srgbClr val="FFFFFF"/>
                 </a:solidFill>
-                <a:latin typeface="Calibri" pitchFamily="34" charset="0"/>
+                <a:latin typeface="Amiri" pitchFamily="2" charset="-78"/>
                 <a:ea typeface="Amiri" pitchFamily="2" charset="-78"/>
                 <a:cs typeface="Amiri" pitchFamily="2" charset="-78"/>
               </a:rPr>
@@ -4844,7 +4844,7 @@
                 <a:solidFill>
                   <a:srgbClr val="FFFFFF"/>
                 </a:solidFill>
-                <a:latin typeface="Calibri" pitchFamily="34" charset="0"/>
+                <a:latin typeface="Amiri" pitchFamily="2" charset="-78"/>
                 <a:ea typeface="Amiri" pitchFamily="2" charset="-78"/>
                 <a:cs typeface="Amiri" pitchFamily="2" charset="-78"/>
               </a:rPr>
@@ -4910,7 +4910,7 @@
                 <a:solidFill>
                   <a:srgbClr val="FFFFFF"/>
                 </a:solidFill>
-                <a:latin typeface="Calibri" pitchFamily="34" charset="0"/>
+                <a:latin typeface="Amiri" pitchFamily="2" charset="-78"/>
                 <a:ea typeface="Amiri" pitchFamily="2" charset="-78"/>
                 <a:cs typeface="Amiri" pitchFamily="2" charset="-78"/>
               </a:rPr>
@@ -4976,7 +4976,7 @@
                 <a:solidFill>
                   <a:srgbClr val="FFFFFF"/>
                 </a:solidFill>
-                <a:latin typeface="Calibri" pitchFamily="34" charset="0"/>
+                <a:latin typeface="Amiri" pitchFamily="2" charset="-78"/>
                 <a:ea typeface="Amiri" pitchFamily="2" charset="-78"/>
                 <a:cs typeface="Amiri" pitchFamily="2" charset="-78"/>
               </a:rPr>
@@ -5042,7 +5042,7 @@
                 <a:solidFill>
                   <a:srgbClr val="FFFFFF"/>
                 </a:solidFill>
-                <a:latin typeface="Calibri" pitchFamily="34" charset="0"/>
+                <a:latin typeface="Amiri" pitchFamily="2" charset="-78"/>
                 <a:ea typeface="Amiri" pitchFamily="2" charset="-78"/>
                 <a:cs typeface="Amiri" pitchFamily="2" charset="-78"/>
               </a:rPr>
@@ -8599,7 +8599,7 @@
                 <a:solidFill>
                   <a:srgbClr val="FFFFFF"/>
                 </a:solidFill>
-                <a:latin typeface="Calibri" pitchFamily="34" charset="0"/>
+                <a:latin typeface="Amiri" pitchFamily="2" charset="-78"/>
                 <a:ea typeface="Amiri" pitchFamily="2" charset="-78"/>
                 <a:cs typeface="Amiri" pitchFamily="2" charset="-78"/>
               </a:rPr>
@@ -8665,7 +8665,7 @@
                 <a:solidFill>
                   <a:srgbClr val="FFFFFF"/>
                 </a:solidFill>
-                <a:latin typeface="Calibri" pitchFamily="34" charset="0"/>
+                <a:latin typeface="Amiri" pitchFamily="2" charset="-78"/>
                 <a:ea typeface="Amiri" pitchFamily="2" charset="-78"/>
                 <a:cs typeface="Amiri" pitchFamily="2" charset="-78"/>
               </a:rPr>
@@ -8731,7 +8731,7 @@
                 <a:solidFill>
                   <a:srgbClr val="FFFFFF"/>
                 </a:solidFill>
-                <a:latin typeface="Calibri" pitchFamily="34" charset="0"/>
+                <a:latin typeface="Amiri" pitchFamily="2" charset="-78"/>
                 <a:ea typeface="Amiri" pitchFamily="2" charset="-78"/>
                 <a:cs typeface="Amiri" pitchFamily="2" charset="-78"/>
               </a:rPr>
@@ -8797,7 +8797,7 @@
                 <a:solidFill>
                   <a:srgbClr val="FFFFFF"/>
                 </a:solidFill>
-                <a:latin typeface="Calibri" pitchFamily="34" charset="0"/>
+                <a:latin typeface="Amiri" pitchFamily="2" charset="-78"/>
                 <a:ea typeface="Amiri" pitchFamily="2" charset="-78"/>
                 <a:cs typeface="Amiri" pitchFamily="2" charset="-78"/>
               </a:rPr>
@@ -9584,7 +9584,7 @@
                 <a:solidFill>
                   <a:srgbClr val="FFFFFF"/>
                 </a:solidFill>
-                <a:latin typeface="Calibri" pitchFamily="34" charset="0"/>
+                <a:latin typeface="Amiri" pitchFamily="2" charset="-78"/>
                 <a:ea typeface="Amiri" pitchFamily="2" charset="-78"/>
                 <a:cs typeface="Amiri" pitchFamily="2" charset="-78"/>
               </a:rPr>
@@ -9650,7 +9650,7 @@
                 <a:solidFill>
                   <a:srgbClr val="FFFFFF"/>
                 </a:solidFill>
-                <a:latin typeface="Calibri" pitchFamily="34" charset="0"/>
+                <a:latin typeface="Amiri" pitchFamily="2" charset="-78"/>
                 <a:ea typeface="Amiri" pitchFamily="2" charset="-78"/>
                 <a:cs typeface="Amiri" pitchFamily="2" charset="-78"/>
               </a:rPr>
@@ -9716,7 +9716,7 @@
                 <a:solidFill>
                   <a:srgbClr val="FFFFFF"/>
                 </a:solidFill>
-                <a:latin typeface="Calibri" pitchFamily="34" charset="0"/>
+                <a:latin typeface="Amiri" pitchFamily="2" charset="-78"/>
                 <a:ea typeface="Amiri" pitchFamily="2" charset="-78"/>
                 <a:cs typeface="Amiri" pitchFamily="2" charset="-78"/>
               </a:rPr>
@@ -9782,7 +9782,7 @@
                 <a:solidFill>
                   <a:srgbClr val="FFFFFF"/>
                 </a:solidFill>
-                <a:latin typeface="Calibri" pitchFamily="34" charset="0"/>
+                <a:latin typeface="Amiri" pitchFamily="2" charset="-78"/>
                 <a:ea typeface="Amiri" pitchFamily="2" charset="-78"/>
                 <a:cs typeface="Amiri" pitchFamily="2" charset="-78"/>
               </a:rPr>
@@ -10569,7 +10569,7 @@
                 <a:solidFill>
                   <a:srgbClr val="FFFFFF"/>
                 </a:solidFill>
-                <a:latin typeface="Calibri" pitchFamily="34" charset="0"/>
+                <a:latin typeface="Amiri" pitchFamily="2" charset="-78"/>
                 <a:ea typeface="Amiri" pitchFamily="2" charset="-78"/>
                 <a:cs typeface="Amiri" pitchFamily="2" charset="-78"/>
               </a:rPr>
@@ -10635,7 +10635,7 @@
                 <a:solidFill>
                   <a:srgbClr val="FFFFFF"/>
                 </a:solidFill>
-                <a:latin typeface="Calibri" pitchFamily="34" charset="0"/>
+                <a:latin typeface="Amiri" pitchFamily="2" charset="-78"/>
                 <a:ea typeface="Amiri" pitchFamily="2" charset="-78"/>
                 <a:cs typeface="Amiri" pitchFamily="2" charset="-78"/>
               </a:rPr>
@@ -10701,7 +10701,7 @@
                 <a:solidFill>
                   <a:srgbClr val="FFFFFF"/>
                 </a:solidFill>
-                <a:latin typeface="Calibri" pitchFamily="34" charset="0"/>
+                <a:latin typeface="Amiri" pitchFamily="2" charset="-78"/>
                 <a:ea typeface="Amiri" pitchFamily="2" charset="-78"/>
                 <a:cs typeface="Amiri" pitchFamily="2" charset="-78"/>
               </a:rPr>
@@ -10767,7 +10767,7 @@
                 <a:solidFill>
                   <a:srgbClr val="FFFFFF"/>
                 </a:solidFill>
-                <a:latin typeface="Calibri" pitchFamily="34" charset="0"/>
+                <a:latin typeface="Amiri" pitchFamily="2" charset="-78"/>
                 <a:ea typeface="Amiri" pitchFamily="2" charset="-78"/>
                 <a:cs typeface="Amiri" pitchFamily="2" charset="-78"/>
               </a:rPr>
